--- a/submission/Schema_Kritical_Submit.pptx
+++ b/submission/Schema_Kritical_Submit.pptx
@@ -2,20 +2,20 @@
 <file path=ppt/presentation.xml><?xml version="1.0" encoding="utf-8"?>
 <p:presentation xmlns:p="http://schemas.openxmlformats.org/presentationml/2006/main">
   <p:sldMasterIdLst>
-    <p:sldMasterId xmlns:r="http://schemas.openxmlformats.org/officeDocument/2006/relationships" id="2147483648" r:id="R3d66e1ea47f44985"/>
+    <p:sldMasterId xmlns:r="http://schemas.openxmlformats.org/officeDocument/2006/relationships" id="2147483648" r:id="R047d0e6068e245ee"/>
   </p:sldMasterIdLst>
   <p:notesMasterIdLst>
-    <p:notesMasterId xmlns:r="http://schemas.openxmlformats.org/officeDocument/2006/relationships" r:id="R10ffd91fc2e94fce"/>
+    <p:notesMasterId xmlns:r="http://schemas.openxmlformats.org/officeDocument/2006/relationships" r:id="R95cc408522514ab3"/>
   </p:notesMasterIdLst>
   <p:sldIdLst>
-    <p:sldId xmlns:r="http://schemas.openxmlformats.org/officeDocument/2006/relationships" id="256" r:id="R996aca3b26354a09"/>
-    <p:sldId xmlns:r="http://schemas.openxmlformats.org/officeDocument/2006/relationships" id="257" r:id="R04fd34996a144054"/>
-    <p:sldId xmlns:r="http://schemas.openxmlformats.org/officeDocument/2006/relationships" id="258" r:id="Rf047cc56cef847f9"/>
-    <p:sldId xmlns:r="http://schemas.openxmlformats.org/officeDocument/2006/relationships" id="259" r:id="R627660584e994b8a"/>
-    <p:sldId xmlns:r="http://schemas.openxmlformats.org/officeDocument/2006/relationships" id="260" r:id="Rdf48808ad49d4b65"/>
-    <p:sldId xmlns:r="http://schemas.openxmlformats.org/officeDocument/2006/relationships" id="261" r:id="R2fc72dad263a4e68"/>
-    <p:sldId xmlns:r="http://schemas.openxmlformats.org/officeDocument/2006/relationships" id="262" r:id="Ra5746ab490d34001"/>
-    <p:sldId xmlns:r="http://schemas.openxmlformats.org/officeDocument/2006/relationships" id="263" r:id="R6eaa726844a64cb3"/>
+    <p:sldId xmlns:r="http://schemas.openxmlformats.org/officeDocument/2006/relationships" id="256" r:id="R8b5c6a50a5a14313"/>
+    <p:sldId xmlns:r="http://schemas.openxmlformats.org/officeDocument/2006/relationships" id="257" r:id="Rd4aa1421b7c4408f"/>
+    <p:sldId xmlns:r="http://schemas.openxmlformats.org/officeDocument/2006/relationships" id="258" r:id="R68afe7ebd7b84a03"/>
+    <p:sldId xmlns:r="http://schemas.openxmlformats.org/officeDocument/2006/relationships" id="259" r:id="Ref7010259a494cc7"/>
+    <p:sldId xmlns:r="http://schemas.openxmlformats.org/officeDocument/2006/relationships" id="260" r:id="Rfec373d902a64e26"/>
+    <p:sldId xmlns:r="http://schemas.openxmlformats.org/officeDocument/2006/relationships" id="261" r:id="R976d92e337464348"/>
+    <p:sldId xmlns:r="http://schemas.openxmlformats.org/officeDocument/2006/relationships" id="262" r:id="Rb0a65c6e66634d16"/>
+    <p:sldId xmlns:r="http://schemas.openxmlformats.org/officeDocument/2006/relationships" id="263" r:id="Rc931fa01d9f24749"/>
   </p:sldIdLst>
   <p:sldSz cx="9144000" cy="5143500"/>
   <p:notesSz cx="6858000" cy="9144000"/>
@@ -447,7 +447,11 @@
         <p:txBody>
           <a:bodyPr xmlns:a="http://schemas.openxmlformats.org/drawingml/2006/main"/>
           <a:lstStyle xmlns:a="http://schemas.openxmlformats.org/drawingml/2006/main"/>
-          <a:p xmlns:a="http://schemas.openxmlformats.org/drawingml/2006/main"/>
+          <a:p xmlns:a="http://schemas.openxmlformats.org/drawingml/2006/main">
+            <a:r>
+              <a:t>Schema preserves the story behind a photo. The user writes the personal note and approves any public event details before they enter the journal. The Kritical prototype uses TinyFish for that event-research step.</a:t>
+            </a:r>
+          </a:p>
         </p:txBody>
       </p:sp>
       <p:sp>
@@ -513,7 +517,11 @@
         <p:txBody>
           <a:bodyPr xmlns:a="http://schemas.openxmlformats.org/drawingml/2006/main"/>
           <a:lstStyle xmlns:a="http://schemas.openxmlformats.org/drawingml/2006/main"/>
-          <a:p xmlns:a="http://schemas.openxmlformats.org/drawingml/2006/main"/>
+          <a:p xmlns:a="http://schemas.openxmlformats.org/drawingml/2006/main">
+            <a:r>
+              <a:t>Our initial audience is adults aged 18–30 who want a private record of their lives. We propose a 20-person adult pilot to measure capture and revisits. This is a target, not completed research.</a:t>
+            </a:r>
+          </a:p>
         </p:txBody>
       </p:sp>
       <p:sp>
@@ -579,7 +587,11 @@
         <p:txBody>
           <a:bodyPr xmlns:a="http://schemas.openxmlformats.org/drawingml/2006/main"/>
           <a:lstStyle xmlns:a="http://schemas.openxmlformats.org/drawingml/2006/main"/>
-          <a:p xmlns:a="http://schemas.openxmlformats.org/drawingml/2006/main"/>
+          <a:p xmlns:a="http://schemas.openxmlformats.org/drawingml/2006/main">
+            <a:r>
+              <a:t>The courtyard gig is an illustrative journal page. A personal note and public event context have different sources. The user chooses what to include, then edits and saves the page.</a:t>
+            </a:r>
+          </a:p>
         </p:txBody>
       </p:sp>
       <p:sp>
@@ -645,7 +657,11 @@
         <p:txBody>
           <a:bodyPr xmlns:a="http://schemas.openxmlformats.org/drawingml/2006/main"/>
           <a:lstStyle xmlns:a="http://schemas.openxmlformats.org/drawingml/2006/main"/>
-          <a:p xmlns:a="http://schemas.openxmlformats.org/drawingml/2006/main"/>
+          <a:p xmlns:a="http://schemas.openxmlformats.org/drawingml/2006/main">
+            <a:r>
+              <a:t>Live connected TinyFish provider run 43e6a572-a11c-45c5-b8b5-a355b2abe946 completed on 20 October 2026 in five steps. This was not an authenticated request from a deployed Schema host. Dates/venue independently checked: https://us.pycon.org/2026/ . Evidence JSON is included in source. API limit documentation: https://docs.tinyfish.ai/key-concepts/runs .</a:t>
+            </a:r>
+          </a:p>
         </p:txBody>
       </p:sp>
       <p:sp>
@@ -711,7 +727,11 @@
         <p:txBody>
           <a:bodyPr xmlns:a="http://schemas.openxmlformats.org/drawingml/2006/main"/>
           <a:lstStyle xmlns:a="http://schemas.openxmlformats.org/drawingml/2006/main"/>
-          <a:p xmlns:a="http://schemas.openxmlformats.org/drawingml/2006/main"/>
+          <a:p xmlns:a="http://schemas.openxmlformats.org/drawingml/2006/main">
+            <a:r>
+              <a:t>Architecture verified from the copied source: app/api/tinyfish/route.ts, lib/tinyfish/provider.mjs, lib/tinyfish/context.mjs, lib/customer/ai.mjs and customer database adapters. Current standalone data layer uses Supabase Postgres/private storage. No pgvector/semantic retrieval or end-to-end encryption claim is made. Provider execution and authentication remain separate verification gates.</a:t>
+            </a:r>
+          </a:p>
         </p:txBody>
       </p:sp>
       <p:sp>
@@ -777,7 +797,11 @@
         <p:txBody>
           <a:bodyPr xmlns:a="http://schemas.openxmlformats.org/drawingml/2006/main"/>
           <a:lstStyle xmlns:a="http://schemas.openxmlformats.org/drawingml/2006/main"/>
-          <a:p xmlns:a="http://schemas.openxmlformats.org/drawingml/2006/main"/>
+          <a:p xmlns:a="http://schemas.openxmlformats.org/drawingml/2006/main">
+            <a:r>
+              <a:t>All prices, usage, FX, tax treatment and AI/support budgets are planning assumptions. Not a profit forecast. Detailed formulas: Schema_Kritical_Economics.xlsx. Provider rates checked 20 October 2026: https://www.tinyfish.ai/pricing ($0.016/step), https://supabase.com/pricing ($0.0213/GB-month storage and $0.09/GB uncached egress overages), https://razorpay.com/pricing/ (2% standard gateway fee, excludes promotions). A ₹149 tax-inclusive customer price is modeled with illustrative 18% sales tax and 18% tax on the gateway fee. Typical cost ₹26.607. Net receipts ₹122.755. Contribution ₹96.148 before free users and fixed costs. At 100 paid and 900 free users, typical cohort balance ≈₹2,860/month before salaries/acquisition, while the full-allowance stress case is slightly negative. No annual discount until real usage validates the model.</a:t>
+            </a:r>
+          </a:p>
         </p:txBody>
       </p:sp>
       <p:sp>
@@ -843,7 +867,11 @@
         <p:txBody>
           <a:bodyPr xmlns:a="http://schemas.openxmlformats.org/drawingml/2006/main"/>
           <a:lstStyle xmlns:a="http://schemas.openxmlformats.org/drawingml/2006/main"/>
-          <a:p xmlns:a="http://schemas.openxmlformats.org/drawingml/2006/main"/>
+          <a:p xmlns:a="http://schemas.openxmlformats.org/drawingml/2006/main">
+            <a:r>
+              <a:t>Competitors already provide media, AI, prompts and sharing, so those alone are not unique. Public USD prices checked 20 October 2026: https://dayoneapp.com/plans/ and https://journey.cloud/membership . These are not India checkout quotes or equivalent feature bundles. Schema plan limits are proposed, not implemented billing entitlements. Research trial cost needs a finite acquisition budget. Pilot numbers are targets, not achieved traction.</a:t>
+            </a:r>
+          </a:p>
         </p:txBody>
       </p:sp>
       <p:sp>
@@ -909,7 +937,11 @@
         <p:txBody>
           <a:bodyPr xmlns:a="http://schemas.openxmlformats.org/drawingml/2006/main"/>
           <a:lstStyle xmlns:a="http://schemas.openxmlformats.org/drawingml/2006/main"/>
-          <a:p xmlns:a="http://schemas.openxmlformats.org/drawingml/2006/main"/>
+          <a:p xmlns:a="http://schemas.openxmlformats.org/drawingml/2006/main">
+            <a:r>
+              <a:t>The prototype includes journal editing, the life archive and TinyFish fact review. The automated suite covers core services, provider boundaries and reviewed-draft persistence, including an explicit recorded-result CLI reproduction. The five-step result is a live provider extraction, not a hosted-account acceptance test. Next, an opt-in adult pilot will test capture and revisits. Native mobile and semantic memory threads are future work.</a:t>
+            </a:r>
+          </a:p>
         </p:txBody>
       </p:sp>
       <p:sp>
@@ -954,7 +986,7 @@
           <p:cNvPr id="3" name="Title">
             <a:extLst xmlns:a="http://schemas.openxmlformats.org/drawingml/2006/main">
               <a:ext uri="{FF2B5EF4-FFF2-40B4-BE49-F238E27FC236}">
-                <a16:creationId xmlns:a16="http://schemas.microsoft.com/office/drawing/2014/main" id="{EEB1610A-3BA6-4423-A1E1-026AD0E5C056}"/>
+                <a16:creationId xmlns:a16="http://schemas.microsoft.com/office/drawing/2014/main" id="{6D06E6F3-74C5-40E9-8B18-51307742E243}"/>
               </a:ext>
             </a:extLst>
           </p:cNvPr>
@@ -1183,7 +1215,7 @@
           <p:cNvPr id="2" name="Subtitle">
             <a:extLst xmlns:a="http://schemas.openxmlformats.org/drawingml/2006/main">
               <a:ext uri="{FF2B5EF4-FFF2-40B4-BE49-F238E27FC236}">
-                <a16:creationId xmlns:a16="http://schemas.microsoft.com/office/drawing/2014/main" id="{003C48D2-7CEE-45E4-BF87-E75B7CC54259}"/>
+                <a16:creationId xmlns:a16="http://schemas.microsoft.com/office/drawing/2014/main" id="{4A1121F7-A5D8-4945-BD5A-A90E28750252}"/>
               </a:ext>
             </a:extLst>
           </p:cNvPr>
@@ -1429,7 +1461,7 @@
           <p:cNvPr id="2" name="Section title">
             <a:extLst xmlns:a="http://schemas.openxmlformats.org/drawingml/2006/main">
               <a:ext uri="{FF2B5EF4-FFF2-40B4-BE49-F238E27FC236}">
-                <a16:creationId xmlns:a16="http://schemas.microsoft.com/office/drawing/2014/main" id="{99B41896-C944-44DD-9888-507DF7871830}"/>
+                <a16:creationId xmlns:a16="http://schemas.microsoft.com/office/drawing/2014/main" id="{5CDAFA38-99C8-4647-90B3-8023849AC181}"/>
               </a:ext>
             </a:extLst>
           </p:cNvPr>
@@ -1675,7 +1707,7 @@
           <p:cNvPr id="3" name="Title">
             <a:extLst xmlns:a="http://schemas.openxmlformats.org/drawingml/2006/main">
               <a:ext uri="{FF2B5EF4-FFF2-40B4-BE49-F238E27FC236}">
-                <a16:creationId xmlns:a16="http://schemas.microsoft.com/office/drawing/2014/main" id="{28C3B606-4C09-42A4-BE59-757B33FF8B51}"/>
+                <a16:creationId xmlns:a16="http://schemas.microsoft.com/office/drawing/2014/main" id="{0F23AA2F-0621-41A7-94E2-855C7E338406}"/>
               </a:ext>
             </a:extLst>
           </p:cNvPr>
@@ -1904,7 +1936,7 @@
           <p:cNvPr id="2" name="Body">
             <a:extLst xmlns:a="http://schemas.openxmlformats.org/drawingml/2006/main">
               <a:ext uri="{FF2B5EF4-FFF2-40B4-BE49-F238E27FC236}">
-                <a16:creationId xmlns:a16="http://schemas.microsoft.com/office/drawing/2014/main" id="{0688F2E9-4357-4205-8B82-2474FF9EB5E9}"/>
+                <a16:creationId xmlns:a16="http://schemas.microsoft.com/office/drawing/2014/main" id="{28899424-12E8-4A12-9DD2-0AE7B900D45E}"/>
               </a:ext>
             </a:extLst>
           </p:cNvPr>
@@ -2150,7 +2182,7 @@
           <p:cNvPr id="4" name="Title">
             <a:extLst xmlns:a="http://schemas.openxmlformats.org/drawingml/2006/main">
               <a:ext uri="{FF2B5EF4-FFF2-40B4-BE49-F238E27FC236}">
-                <a16:creationId xmlns:a16="http://schemas.microsoft.com/office/drawing/2014/main" id="{32C37221-BFDD-4D58-B886-A28C9C1B7FF2}"/>
+                <a16:creationId xmlns:a16="http://schemas.microsoft.com/office/drawing/2014/main" id="{2B87A300-3BD9-40DE-920D-80FFC4948480}"/>
               </a:ext>
             </a:extLst>
           </p:cNvPr>
@@ -2379,7 +2411,7 @@
           <p:cNvPr id="2" name="Left column">
             <a:extLst xmlns:a="http://schemas.openxmlformats.org/drawingml/2006/main">
               <a:ext uri="{FF2B5EF4-FFF2-40B4-BE49-F238E27FC236}">
-                <a16:creationId xmlns:a16="http://schemas.microsoft.com/office/drawing/2014/main" id="{493611C8-5E0F-40A5-A6F2-A78C3D0E640B}"/>
+                <a16:creationId xmlns:a16="http://schemas.microsoft.com/office/drawing/2014/main" id="{B244C53E-62A6-42CD-B832-0B7FF7C260E2}"/>
               </a:ext>
             </a:extLst>
           </p:cNvPr>
@@ -2608,7 +2640,7 @@
           <p:cNvPr id="3" name="Right column">
             <a:extLst xmlns:a="http://schemas.openxmlformats.org/drawingml/2006/main">
               <a:ext uri="{FF2B5EF4-FFF2-40B4-BE49-F238E27FC236}">
-                <a16:creationId xmlns:a16="http://schemas.microsoft.com/office/drawing/2014/main" id="{C08E1ABD-A97E-401F-AE8E-4BBC3CF00DF0}"/>
+                <a16:creationId xmlns:a16="http://schemas.microsoft.com/office/drawing/2014/main" id="{A5230AE1-5DED-4FE8-A91C-3817836EBE4A}"/>
               </a:ext>
             </a:extLst>
           </p:cNvPr>
@@ -2854,7 +2886,7 @@
           <p:cNvPr id="3" name="Title">
             <a:extLst xmlns:a="http://schemas.openxmlformats.org/drawingml/2006/main">
               <a:ext uri="{FF2B5EF4-FFF2-40B4-BE49-F238E27FC236}">
-                <a16:creationId xmlns:a16="http://schemas.microsoft.com/office/drawing/2014/main" id="{0A919227-3A35-4AB0-82CD-45604AE0255C}"/>
+                <a16:creationId xmlns:a16="http://schemas.microsoft.com/office/drawing/2014/main" id="{937F0224-3A1E-42E1-BD36-3DF6E7B6C956}"/>
               </a:ext>
             </a:extLst>
           </p:cNvPr>
@@ -3083,7 +3115,7 @@
           <p:cNvPr id="2" name="Left column">
             <a:extLst xmlns:a="http://schemas.openxmlformats.org/drawingml/2006/main">
               <a:ext uri="{FF2B5EF4-FFF2-40B4-BE49-F238E27FC236}">
-                <a16:creationId xmlns:a16="http://schemas.microsoft.com/office/drawing/2014/main" id="{842C622B-BD74-4CB7-99A3-919457E26275}"/>
+                <a16:creationId xmlns:a16="http://schemas.microsoft.com/office/drawing/2014/main" id="{2F27E9DD-5E6D-4BF2-88CB-C684BC0BED6D}"/>
               </a:ext>
             </a:extLst>
           </p:cNvPr>
@@ -3350,12 +3382,12 @@
   </p:cSld>
   <p:clrMap bg1="lt1" tx1="dk1" bg2="lt2" tx2="dk2" accent1="accent1" accent2="accent2" accent3="accent3" accent4="accent4" accent5="accent5" accent6="accent6" hlink="hlink" folHlink="folHlink"/>
   <p:sldLayoutIdLst>
-    <p:sldLayoutId xmlns:r="http://schemas.openxmlformats.org/officeDocument/2006/relationships" id="2147483649" r:id="R581e81ee599549aa"/>
-    <p:sldLayoutId xmlns:r="http://schemas.openxmlformats.org/officeDocument/2006/relationships" id="2147483650" r:id="R040878cbeeb44a87"/>
-    <p:sldLayoutId xmlns:r="http://schemas.openxmlformats.org/officeDocument/2006/relationships" id="2147483651" r:id="Rffff703430364069"/>
-    <p:sldLayoutId xmlns:r="http://schemas.openxmlformats.org/officeDocument/2006/relationships" id="2147483652" r:id="R03bed3ddddee49e3"/>
-    <p:sldLayoutId xmlns:r="http://schemas.openxmlformats.org/officeDocument/2006/relationships" id="2147483653" r:id="Rca9bb1cb89a04fe2"/>
-    <p:sldLayoutId xmlns:r="http://schemas.openxmlformats.org/officeDocument/2006/relationships" id="2147483654" r:id="Ra26cb8f8c32a4237"/>
+    <p:sldLayoutId xmlns:r="http://schemas.openxmlformats.org/officeDocument/2006/relationships" id="2147483649" r:id="R15db703d991f483e"/>
+    <p:sldLayoutId xmlns:r="http://schemas.openxmlformats.org/officeDocument/2006/relationships" id="2147483650" r:id="R8d0fe5a421e64723"/>
+    <p:sldLayoutId xmlns:r="http://schemas.openxmlformats.org/officeDocument/2006/relationships" id="2147483651" r:id="Rb13c5852d1d647aa"/>
+    <p:sldLayoutId xmlns:r="http://schemas.openxmlformats.org/officeDocument/2006/relationships" id="2147483652" r:id="Ra0db2fbccd784eda"/>
+    <p:sldLayoutId xmlns:r="http://schemas.openxmlformats.org/officeDocument/2006/relationships" id="2147483653" r:id="R62b6b9795c324493"/>
+    <p:sldLayoutId xmlns:r="http://schemas.openxmlformats.org/officeDocument/2006/relationships" id="2147483654" r:id="Rd28f1c3a65d74a15"/>
   </p:sldLayoutIdLst>
   <p:txStyles>
     <p:titleStyle>
@@ -3899,7 +3931,7 @@
           <p:cNvPr id="2" name="">
             <a:extLst xmlns:a="http://schemas.openxmlformats.org/drawingml/2006/main">
               <a:ext uri="{FF2B5EF4-FFF2-40B4-BE49-F238E27FC236}">
-                <a16:creationId xmlns:a16="http://schemas.microsoft.com/office/drawing/2014/main" id="{711CBBA1-3B42-4EF1-BCE4-C72E654FF4B7}"/>
+                <a16:creationId xmlns:a16="http://schemas.microsoft.com/office/drawing/2014/main" id="{B0FB687A-90BD-4970-9DF2-C96D7F9C4109}"/>
               </a:ext>
             </a:extLst>
           </p:cNvPr>
@@ -3909,7 +3941,7 @@
           <p:nvPr/>
         </p:nvPicPr>
         <p:blipFill>
-          <a:blip xmlns:r="http://schemas.openxmlformats.org/officeDocument/2006/relationships" xmlns:a="http://schemas.openxmlformats.org/drawingml/2006/main" r:embed="Rae7d89ef2bee4c64"/>
+          <a:blip xmlns:r="http://schemas.openxmlformats.org/officeDocument/2006/relationships" xmlns:a="http://schemas.openxmlformats.org/drawingml/2006/main" r:embed="R1782a5df6a244d5a"/>
           <a:stretch xmlns:a="http://schemas.openxmlformats.org/drawingml/2006/main"/>
         </p:blipFill>
         <p:spPr>
@@ -3925,7 +3957,7 @@
     </p:spTree>
     <p:extLst>
       <p:ext uri="{BB962C8B-B14F-4D97-AF65-F5344CB8AC3E}">
-        <p14:creationId xmlns:p14="http://schemas.microsoft.com/office/powerpoint/2010/main" val="2086407844"/>
+        <p14:creationId xmlns:p14="http://schemas.microsoft.com/office/powerpoint/2010/main" val="1158040336"/>
       </p:ext>
     </p:extLst>
   </p:cSld>
@@ -3949,7 +3981,7 @@
           <p:cNvPr id="2" name="">
             <a:extLst xmlns:a="http://schemas.openxmlformats.org/drawingml/2006/main">
               <a:ext uri="{FF2B5EF4-FFF2-40B4-BE49-F238E27FC236}">
-                <a16:creationId xmlns:a16="http://schemas.microsoft.com/office/drawing/2014/main" id="{2B6E1A87-25E0-44E8-8CDE-87A1C5E39009}"/>
+                <a16:creationId xmlns:a16="http://schemas.microsoft.com/office/drawing/2014/main" id="{FD49FBB7-1998-4068-8E2F-E1199A3B434E}"/>
               </a:ext>
             </a:extLst>
           </p:cNvPr>
@@ -3959,7 +3991,7 @@
           <p:nvPr/>
         </p:nvPicPr>
         <p:blipFill>
-          <a:blip xmlns:r="http://schemas.openxmlformats.org/officeDocument/2006/relationships" xmlns:a="http://schemas.openxmlformats.org/drawingml/2006/main" r:embed="R0f419235c4f64c9a"/>
+          <a:blip xmlns:r="http://schemas.openxmlformats.org/officeDocument/2006/relationships" xmlns:a="http://schemas.openxmlformats.org/drawingml/2006/main" r:embed="Rb3458ce9bb94446b"/>
           <a:stretch xmlns:a="http://schemas.openxmlformats.org/drawingml/2006/main"/>
         </p:blipFill>
         <p:spPr>
@@ -3975,7 +4007,7 @@
     </p:spTree>
     <p:extLst>
       <p:ext uri="{BB962C8B-B14F-4D97-AF65-F5344CB8AC3E}">
-        <p14:creationId xmlns:p14="http://schemas.microsoft.com/office/powerpoint/2010/main" val="1460592647"/>
+        <p14:creationId xmlns:p14="http://schemas.microsoft.com/office/powerpoint/2010/main" val="1337091160"/>
       </p:ext>
     </p:extLst>
   </p:cSld>
@@ -3999,7 +4031,7 @@
           <p:cNvPr id="2" name="">
             <a:extLst xmlns:a="http://schemas.openxmlformats.org/drawingml/2006/main">
               <a:ext uri="{FF2B5EF4-FFF2-40B4-BE49-F238E27FC236}">
-                <a16:creationId xmlns:a16="http://schemas.microsoft.com/office/drawing/2014/main" id="{413674B9-0B2D-4EDE-B48C-409C0720F40E}"/>
+                <a16:creationId xmlns:a16="http://schemas.microsoft.com/office/drawing/2014/main" id="{48F3B1DC-17D0-4982-9F01-AB805CDC8C5F}"/>
               </a:ext>
             </a:extLst>
           </p:cNvPr>
@@ -4009,7 +4041,7 @@
           <p:nvPr/>
         </p:nvPicPr>
         <p:blipFill>
-          <a:blip xmlns:r="http://schemas.openxmlformats.org/officeDocument/2006/relationships" xmlns:a="http://schemas.openxmlformats.org/drawingml/2006/main" r:embed="R608bd588900e42e6"/>
+          <a:blip xmlns:r="http://schemas.openxmlformats.org/officeDocument/2006/relationships" xmlns:a="http://schemas.openxmlformats.org/drawingml/2006/main" r:embed="R2aaad2b202cb4c67"/>
           <a:stretch xmlns:a="http://schemas.openxmlformats.org/drawingml/2006/main"/>
         </p:blipFill>
         <p:spPr>
@@ -4025,7 +4057,7 @@
     </p:spTree>
     <p:extLst>
       <p:ext uri="{BB962C8B-B14F-4D97-AF65-F5344CB8AC3E}">
-        <p14:creationId xmlns:p14="http://schemas.microsoft.com/office/powerpoint/2010/main" val="969908772"/>
+        <p14:creationId xmlns:p14="http://schemas.microsoft.com/office/powerpoint/2010/main" val="1109758864"/>
       </p:ext>
     </p:extLst>
   </p:cSld>
@@ -4049,7 +4081,7 @@
           <p:cNvPr id="2" name="">
             <a:extLst xmlns:a="http://schemas.openxmlformats.org/drawingml/2006/main">
               <a:ext uri="{FF2B5EF4-FFF2-40B4-BE49-F238E27FC236}">
-                <a16:creationId xmlns:a16="http://schemas.microsoft.com/office/drawing/2014/main" id="{FE2FEE40-0862-42A7-A6A0-9F6767358F87}"/>
+                <a16:creationId xmlns:a16="http://schemas.microsoft.com/office/drawing/2014/main" id="{B5CAE7AC-3FA9-4F17-A37A-D677B64A2230}"/>
               </a:ext>
             </a:extLst>
           </p:cNvPr>
@@ -4059,7 +4091,7 @@
           <p:nvPr/>
         </p:nvPicPr>
         <p:blipFill>
-          <a:blip xmlns:r="http://schemas.openxmlformats.org/officeDocument/2006/relationships" xmlns:a="http://schemas.openxmlformats.org/drawingml/2006/main" r:embed="Rf8ff3609ecc14bac"/>
+          <a:blip xmlns:r="http://schemas.openxmlformats.org/officeDocument/2006/relationships" xmlns:a="http://schemas.openxmlformats.org/drawingml/2006/main" r:embed="Ra011d4368cf6429d"/>
           <a:stretch xmlns:a="http://schemas.openxmlformats.org/drawingml/2006/main"/>
         </p:blipFill>
         <p:spPr>
@@ -4075,7 +4107,7 @@
     </p:spTree>
     <p:extLst>
       <p:ext uri="{BB962C8B-B14F-4D97-AF65-F5344CB8AC3E}">
-        <p14:creationId xmlns:p14="http://schemas.microsoft.com/office/powerpoint/2010/main" val="1624376859"/>
+        <p14:creationId xmlns:p14="http://schemas.microsoft.com/office/powerpoint/2010/main" val="1558587554"/>
       </p:ext>
     </p:extLst>
   </p:cSld>
@@ -4099,7 +4131,7 @@
           <p:cNvPr id="2" name="">
             <a:extLst xmlns:a="http://schemas.openxmlformats.org/drawingml/2006/main">
               <a:ext uri="{FF2B5EF4-FFF2-40B4-BE49-F238E27FC236}">
-                <a16:creationId xmlns:a16="http://schemas.microsoft.com/office/drawing/2014/main" id="{8C533FA2-94EF-4226-A11C-A897F3D9CAEE}"/>
+                <a16:creationId xmlns:a16="http://schemas.microsoft.com/office/drawing/2014/main" id="{760E4613-6508-4D45-870F-85593A2F49E4}"/>
               </a:ext>
             </a:extLst>
           </p:cNvPr>
@@ -4109,7 +4141,7 @@
           <p:nvPr/>
         </p:nvPicPr>
         <p:blipFill>
-          <a:blip xmlns:r="http://schemas.openxmlformats.org/officeDocument/2006/relationships" xmlns:a="http://schemas.openxmlformats.org/drawingml/2006/main" r:embed="Rd360073c8c5a4108"/>
+          <a:blip xmlns:r="http://schemas.openxmlformats.org/officeDocument/2006/relationships" xmlns:a="http://schemas.openxmlformats.org/drawingml/2006/main" r:embed="Rd919538563b24d5e"/>
           <a:stretch xmlns:a="http://schemas.openxmlformats.org/drawingml/2006/main"/>
         </p:blipFill>
         <p:spPr>
@@ -4125,7 +4157,7 @@
     </p:spTree>
     <p:extLst>
       <p:ext uri="{BB962C8B-B14F-4D97-AF65-F5344CB8AC3E}">
-        <p14:creationId xmlns:p14="http://schemas.microsoft.com/office/powerpoint/2010/main" val="654936571"/>
+        <p14:creationId xmlns:p14="http://schemas.microsoft.com/office/powerpoint/2010/main" val="38182969"/>
       </p:ext>
     </p:extLst>
   </p:cSld>
@@ -4149,7 +4181,7 @@
           <p:cNvPr id="2" name="">
             <a:extLst xmlns:a="http://schemas.openxmlformats.org/drawingml/2006/main">
               <a:ext uri="{FF2B5EF4-FFF2-40B4-BE49-F238E27FC236}">
-                <a16:creationId xmlns:a16="http://schemas.microsoft.com/office/drawing/2014/main" id="{4ABE589E-ADC9-4F09-AD43-4DF99A9EA29C}"/>
+                <a16:creationId xmlns:a16="http://schemas.microsoft.com/office/drawing/2014/main" id="{578150A8-C535-4BA8-B3BD-D2D13DDC4220}"/>
               </a:ext>
             </a:extLst>
           </p:cNvPr>
@@ -4159,7 +4191,7 @@
           <p:nvPr/>
         </p:nvPicPr>
         <p:blipFill>
-          <a:blip xmlns:r="http://schemas.openxmlformats.org/officeDocument/2006/relationships" xmlns:a="http://schemas.openxmlformats.org/drawingml/2006/main" r:embed="R5fd5a66c591a45f6"/>
+          <a:blip xmlns:r="http://schemas.openxmlformats.org/officeDocument/2006/relationships" xmlns:a="http://schemas.openxmlformats.org/drawingml/2006/main" r:embed="R2304fa4cae454e00"/>
           <a:stretch xmlns:a="http://schemas.openxmlformats.org/drawingml/2006/main"/>
         </p:blipFill>
         <p:spPr>
@@ -4175,7 +4207,7 @@
     </p:spTree>
     <p:extLst>
       <p:ext uri="{BB962C8B-B14F-4D97-AF65-F5344CB8AC3E}">
-        <p14:creationId xmlns:p14="http://schemas.microsoft.com/office/powerpoint/2010/main" val="1485942333"/>
+        <p14:creationId xmlns:p14="http://schemas.microsoft.com/office/powerpoint/2010/main" val="990481610"/>
       </p:ext>
     </p:extLst>
   </p:cSld>
@@ -4199,7 +4231,7 @@
           <p:cNvPr id="2" name="">
             <a:extLst xmlns:a="http://schemas.openxmlformats.org/drawingml/2006/main">
               <a:ext uri="{FF2B5EF4-FFF2-40B4-BE49-F238E27FC236}">
-                <a16:creationId xmlns:a16="http://schemas.microsoft.com/office/drawing/2014/main" id="{88D0AF96-0154-4587-84BC-4C60CEB2C177}"/>
+                <a16:creationId xmlns:a16="http://schemas.microsoft.com/office/drawing/2014/main" id="{21DA2605-CF7F-461E-B975-B2B2FA3DEF6A}"/>
               </a:ext>
             </a:extLst>
           </p:cNvPr>
@@ -4209,7 +4241,7 @@
           <p:nvPr/>
         </p:nvPicPr>
         <p:blipFill>
-          <a:blip xmlns:r="http://schemas.openxmlformats.org/officeDocument/2006/relationships" xmlns:a="http://schemas.openxmlformats.org/drawingml/2006/main" r:embed="Rcf18328bdcd84df5"/>
+          <a:blip xmlns:r="http://schemas.openxmlformats.org/officeDocument/2006/relationships" xmlns:a="http://schemas.openxmlformats.org/drawingml/2006/main" r:embed="R54db4862ea704d9d"/>
           <a:stretch xmlns:a="http://schemas.openxmlformats.org/drawingml/2006/main"/>
         </p:blipFill>
         <p:spPr>
@@ -4225,7 +4257,7 @@
     </p:spTree>
     <p:extLst>
       <p:ext uri="{BB962C8B-B14F-4D97-AF65-F5344CB8AC3E}">
-        <p14:creationId xmlns:p14="http://schemas.microsoft.com/office/powerpoint/2010/main" val="907167890"/>
+        <p14:creationId xmlns:p14="http://schemas.microsoft.com/office/powerpoint/2010/main" val="102066302"/>
       </p:ext>
     </p:extLst>
   </p:cSld>
@@ -4249,7 +4281,7 @@
           <p:cNvPr id="2" name="">
             <a:extLst xmlns:a="http://schemas.openxmlformats.org/drawingml/2006/main">
               <a:ext uri="{FF2B5EF4-FFF2-40B4-BE49-F238E27FC236}">
-                <a16:creationId xmlns:a16="http://schemas.microsoft.com/office/drawing/2014/main" id="{603AABD1-4C0B-45CB-A5EB-675949E45A8A}"/>
+                <a16:creationId xmlns:a16="http://schemas.microsoft.com/office/drawing/2014/main" id="{1499F6FD-FD66-4AEF-9A40-A561A167CDD6}"/>
               </a:ext>
             </a:extLst>
           </p:cNvPr>
@@ -4259,7 +4291,7 @@
           <p:nvPr/>
         </p:nvPicPr>
         <p:blipFill>
-          <a:blip xmlns:r="http://schemas.openxmlformats.org/officeDocument/2006/relationships" xmlns:a="http://schemas.openxmlformats.org/drawingml/2006/main" r:embed="R2846264e05764b5b"/>
+          <a:blip xmlns:r="http://schemas.openxmlformats.org/officeDocument/2006/relationships" xmlns:a="http://schemas.openxmlformats.org/drawingml/2006/main" r:embed="Rce913c279ca140fb"/>
           <a:stretch xmlns:a="http://schemas.openxmlformats.org/drawingml/2006/main"/>
         </p:blipFill>
         <p:spPr>
@@ -4275,7 +4307,7 @@
     </p:spTree>
     <p:extLst>
       <p:ext uri="{BB962C8B-B14F-4D97-AF65-F5344CB8AC3E}">
-        <p14:creationId xmlns:p14="http://schemas.microsoft.com/office/powerpoint/2010/main" val="1918579256"/>
+        <p14:creationId xmlns:p14="http://schemas.microsoft.com/office/powerpoint/2010/main" val="1993034390"/>
       </p:ext>
     </p:extLst>
   </p:cSld>
